--- a/docs/slides/aitd1_week1_groupwork_with_answers.pptx
+++ b/docs/slides/aitd1_week1_groupwork_with_answers.pptx
@@ -3251,7 +3251,7 @@
                 </a:solidFill>
                 <a:latin typeface="Noto Sans JP"/>
               </a:rPr>
-              <a:t>班番号：</a:t>
+              <a:t>グループ番号：</a:t>
             </a:r>
           </a:p>
         </p:txBody>
@@ -9242,7 +9242,7 @@
                 </a:solidFill>
                 <a:latin typeface="Noto Sans JP"/>
               </a:rPr>
-              <a:t>教員が全体共有で開く．自班の答えと違う箇所を recorder が記録し，質問カードの種にする</a:t>
+              <a:t>教員が全体共有で開く．自グループの答えと違う箇所を recorder が記録し，質問カードの種にする</a:t>
             </a:r>
           </a:p>
         </p:txBody>
@@ -9354,7 +9354,7 @@
                 </a:solidFill>
                 <a:latin typeface="Noto Sans JP"/>
               </a:rPr>
-              <a:t>教員が全体共有で開く．自班の答えと違う箇所を recorder が記録し，質問カードの種にする</a:t>
+              <a:t>教員が全体共有で開く．自グループの答えと違う箇所を recorder が記録し，質問カードの種にする</a:t>
             </a:r>
           </a:p>
         </p:txBody>
@@ -9466,7 +9466,7 @@
                 </a:solidFill>
                 <a:latin typeface="Noto Sans JP"/>
               </a:rPr>
-              <a:t>教員が全体共有で開く．自班の答えと違う箇所を recorder が記録し，質問カードの種にする</a:t>
+              <a:t>教員が全体共有で開く．自グループの答えと違う箇所を recorder が記録し，質問カードの種にする</a:t>
             </a:r>
           </a:p>
         </p:txBody>
@@ -9578,7 +9578,7 @@
                 </a:solidFill>
                 <a:latin typeface="Noto Sans JP"/>
               </a:rPr>
-              <a:t>教員が全体共有で開く．自班の答えと違う箇所を recorder が記録し，質問カードの種にする</a:t>
+              <a:t>教員が全体共有で開く．自グループの答えと違う箇所を recorder が記録し，質問カードの種にする</a:t>
             </a:r>
           </a:p>
         </p:txBody>
